--- a/courses/590-fall-2026/590-lecture-1.pptx
+++ b/courses/590-fall-2026/590-lecture-1.pptx
@@ -3134,7 +3134,8 @@
               <a:buNone/>
             </a:pPr>
             <a:r>
-              <a:t>ERAM 590 - AI and Academic Literature</a:t>
+              <a:rPr/>
+              <a:t>EPOL 590 - AI and Academic Literature</a:t>
             </a:r>
           </a:p>
         </p:txBody>
@@ -3193,24 +3194,28 @@
           <a:p>
             <a:pPr lvl="0"/>
             <a:r>
+              <a:rPr/>
               <a:t>“Industry” orientation: move fast and break things!</a:t>
             </a:r>
           </a:p>
           <a:p>
             <a:pPr lvl="0"/>
             <a:r>
+              <a:rPr/>
               <a:t>Quick sketches of a literature review - with AI (and caveats)</a:t>
             </a:r>
           </a:p>
           <a:p>
             <a:pPr lvl="0"/>
             <a:r>
+              <a:rPr/>
               <a:t>Why? The idea is to build intuitions about (a) how to review literature and (b) how to write-up those reviews quickly</a:t>
             </a:r>
           </a:p>
           <a:p>
             <a:pPr lvl="0"/>
             <a:r>
+              <a:rPr/>
               <a:t>Peer review: really more like turning an individual pursuit into something </a:t>
             </a:r>
             <a:r>
@@ -3218,6 +3223,7 @@
               <a:t>social</a:t>
             </a:r>
             <a:r>
+              <a:rPr/>
               <a:t>.</a:t>
             </a:r>
             <a:br/>
@@ -3226,18 +3232,21 @@
           <a:p>
             <a:pPr lvl="0"/>
             <a:r>
+              <a:rPr/>
               <a:t>AI Orientation:</a:t>
             </a:r>
           </a:p>
           <a:p>
             <a:pPr lvl="1"/>
             <a:r>
+              <a:rPr/>
               <a:t>Understanding that knowledge has always had a technical orientation (paper, printing press, media, computers, Internet)</a:t>
             </a:r>
           </a:p>
           <a:p>
             <a:pPr lvl="1"/>
             <a:r>
+              <a:rPr/>
               <a:t>But we need a critical lens; looking ahead to how technology should make us work harder intellectually (not easier)</a:t>
             </a:r>
           </a:p>
@@ -3297,42 +3306,49 @@
           <a:p>
             <a:pPr lvl="0"/>
             <a:r>
+              <a:rPr/>
               <a:t>We’ll use the 3 hours flexibly</a:t>
             </a:r>
           </a:p>
           <a:p>
             <a:pPr lvl="0"/>
             <a:r>
+              <a:rPr/>
               <a:t>2 x 10 minute breaks on the hour</a:t>
             </a:r>
           </a:p>
           <a:p>
             <a:pPr lvl="0"/>
             <a:r>
+              <a:rPr/>
               <a:t>The 3 hours will encompass (most of) the assessment</a:t>
             </a:r>
           </a:p>
           <a:p>
             <a:pPr lvl="0"/>
             <a:r>
+              <a:rPr/>
               <a:t>Mix of mini-lectures / discussion / group-work</a:t>
             </a:r>
           </a:p>
           <a:p>
             <a:pPr lvl="1"/>
             <a:r>
+              <a:rPr/>
               <a:t>With discussion - we’ll aim to build a lightweight notebook on good literature search / reading / review practices</a:t>
             </a:r>
           </a:p>
           <a:p>
             <a:pPr lvl="1"/>
             <a:r>
+              <a:rPr/>
               <a:t>AI exercises</a:t>
             </a:r>
           </a:p>
           <a:p>
             <a:pPr lvl="0"/>
             <a:r>
+              <a:rPr/>
               <a:t>Mix of theory / practice</a:t>
             </a:r>
           </a:p>
@@ -3392,12 +3408,14 @@
           <a:p>
             <a:pPr lvl="0"/>
             <a:r>
+              <a:rPr/>
               <a:t>What is Literature? What is a Literature Review?</a:t>
             </a:r>
           </a:p>
           <a:p>
             <a:pPr lvl="0"/>
             <a:r>
+              <a:rPr/>
               <a:t>What is Changing? How is AI Impacting Scholarship?</a:t>
             </a:r>
           </a:p>
@@ -3457,18 +3475,21 @@
           <a:p>
             <a:pPr lvl="0"/>
             <a:r>
+              <a:rPr/>
               <a:t>Encourage everyone to use some software (Obsidian etc)</a:t>
             </a:r>
           </a:p>
           <a:p>
             <a:pPr lvl="0"/>
             <a:r>
+              <a:rPr/>
               <a:t>Try to learn Markdown / Zettenkettel…</a:t>
             </a:r>
           </a:p>
           <a:p>
             <a:pPr lvl="0"/>
             <a:r>
+              <a:rPr/>
               <a:t>My own NightOwl - Why?</a:t>
             </a:r>
           </a:p>
@@ -3528,36 +3549,42 @@
           <a:p>
             <a:pPr lvl="0"/>
             <a:r>
+              <a:rPr/>
               <a:t>What we need:</a:t>
             </a:r>
           </a:p>
           <a:p>
             <a:pPr lvl="1"/>
             <a:r>
+              <a:rPr/>
               <a:t>A “continuous document”</a:t>
             </a:r>
           </a:p>
           <a:p>
             <a:pPr lvl="1"/>
             <a:r>
+              <a:rPr/>
               <a:t>Ability to share with peers &amp; annotate</a:t>
             </a:r>
           </a:p>
           <a:p>
             <a:pPr lvl="0"/>
             <a:r>
+              <a:rPr/>
               <a:t>Box / Microsoft Office? HIPAA-compliant but cumbersome</a:t>
             </a:r>
           </a:p>
           <a:p>
             <a:pPr lvl="0"/>
             <a:r>
+              <a:rPr/>
               <a:t>Canvas options?</a:t>
             </a:r>
           </a:p>
           <a:p>
             <a:pPr lvl="0"/>
             <a:r>
+              <a:rPr/>
               <a:t>Google Docs? Not HIPAA-compliant</a:t>
             </a:r>
           </a:p>
@@ -3567,7 +3594,7 @@
               <a:rPr>
                 <a:hlinkClick r:id="rId2"/>
               </a:rPr>
-              <a:t>ERAM 590 - Google Docs</a:t>
+              <a:t>EPOL 590 Fall 2026 class document</a:t>
             </a:r>
           </a:p>
         </p:txBody>
@@ -3634,6 +3661,7 @@
           <a:p>
             <a:pPr lvl="0"/>
             <a:r>
+              <a:rPr/>
               <a:t>Partly a question of </a:t>
             </a:r>
             <a:r>
@@ -3641,18 +3669,21 @@
               <a:t>feel</a:t>
             </a:r>
             <a:r>
+              <a:rPr/>
               <a:t> - experienced researchers know a good question when they see it</a:t>
             </a:r>
           </a:p>
           <a:p>
             <a:pPr lvl="0"/>
             <a:r>
+              <a:rPr/>
               <a:t>Sources:</a:t>
             </a:r>
           </a:p>
           <a:p>
             <a:pPr lvl="1"/>
             <a:r>
+              <a:rPr/>
               <a:t>Informed by </a:t>
             </a:r>
             <a:r>
@@ -3660,12 +3691,14 @@
               <a:t>literature</a:t>
             </a:r>
             <a:r>
+              <a:rPr/>
               <a:t>: what key problems are unsolved?</a:t>
             </a:r>
           </a:p>
           <a:p>
             <a:pPr lvl="1"/>
             <a:r>
+              <a:rPr/>
               <a:t>Informed by </a:t>
             </a:r>
             <a:r>
@@ -3673,12 +3706,14 @@
               <a:t>events</a:t>
             </a:r>
             <a:r>
+              <a:rPr/>
               <a:t>: what is happening and how do we explain it?</a:t>
             </a:r>
           </a:p>
           <a:p>
             <a:pPr lvl="1"/>
             <a:r>
+              <a:rPr/>
               <a:t>Informed by </a:t>
             </a:r>
             <a:r>
@@ -3686,12 +3721,14 @@
               <a:t>circumstance</a:t>
             </a:r>
             <a:r>
+              <a:rPr/>
               <a:t>: it annoys me no-one can answer this question - perhaps I can?</a:t>
             </a:r>
           </a:p>
           <a:p>
             <a:pPr lvl="1"/>
             <a:r>
+              <a:rPr/>
               <a:t>Informed by </a:t>
             </a:r>
             <a:r>
@@ -3699,12 +3736,14 @@
               <a:t>disposition</a:t>
             </a:r>
             <a:r>
+              <a:rPr/>
               <a:t>: I just love working on – or want to know more about – X.</a:t>
             </a:r>
           </a:p>
           <a:p>
             <a:pPr lvl="1"/>
             <a:r>
+              <a:rPr/>
               <a:t>Informed by </a:t>
             </a:r>
             <a:r>
@@ -3712,6 +3751,7 @@
               <a:t>sociality</a:t>
             </a:r>
             <a:r>
+              <a:rPr/>
               <a:t> (FOMO): All the cool kids work on X - should I be working on it too? Or should I </a:t>
             </a:r>
             <a:r>
@@ -3719,6 +3759,7 @@
               <a:t>not</a:t>
             </a:r>
             <a:r>
+              <a:rPr/>
               <a:t> be working on it?</a:t>
             </a:r>
           </a:p>
@@ -3778,12 +3819,14 @@
           <a:p>
             <a:pPr lvl="0"/>
             <a:r>
+              <a:rPr/>
               <a:t>Should I dream up a research question from thin air? Should I wait until I’ve done a systematic literature review?</a:t>
             </a:r>
           </a:p>
           <a:p>
             <a:pPr lvl="0"/>
             <a:r>
+              <a:rPr/>
               <a:t>Think of the relationship between research question and literature review as </a:t>
             </a:r>
             <a:r>
@@ -3791,18 +3834,21 @@
               <a:t>dialectical</a:t>
             </a:r>
             <a:r>
+              <a:rPr/>
               <a:t> (each directing the other):</a:t>
             </a:r>
           </a:p>
           <a:p>
             <a:pPr lvl="1"/>
             <a:r>
+              <a:rPr/>
               <a:t>Think of a draft topic / question</a:t>
             </a:r>
           </a:p>
           <a:p>
             <a:pPr lvl="1"/>
             <a:r>
+              <a:rPr/>
               <a:t>Search on the topic / question. Is it answered? Wholly or partly? Which parts remain?</a:t>
             </a:r>
           </a:p>
@@ -3862,6 +3908,7 @@
               <a:buNone/>
             </a:pPr>
             <a:r>
+              <a:rPr/>
               <a:t>Image</a:t>
             </a:r>
           </a:p>
@@ -3921,6 +3968,7 @@
           <a:p>
             <a:pPr lvl="0"/>
             <a:r>
+              <a:rPr/>
               <a:t>Does the research question </a:t>
             </a:r>
             <a:r>
@@ -3928,6 +3976,7 @@
               <a:t>need an answer</a:t>
             </a:r>
             <a:r>
+              <a:rPr/>
               <a:t>? Is it </a:t>
             </a:r>
             <a:r>
@@ -3935,12 +3984,14 @@
               <a:t>necessary</a:t>
             </a:r>
             <a:r>
+              <a:rPr/>
               <a:t>? Or does it provoke a “so what?” response?</a:t>
             </a:r>
           </a:p>
           <a:p>
             <a:pPr lvl="0"/>
             <a:r>
+              <a:rPr/>
               <a:t>Is it </a:t>
             </a:r>
             <a:r>
@@ -3948,6 +3999,7 @@
               <a:t>doable</a:t>
             </a:r>
             <a:r>
+              <a:rPr/>
               <a:t> and </a:t>
             </a:r>
             <a:r>
@@ -3955,12 +4007,14 @@
               <a:t>feasible</a:t>
             </a:r>
             <a:r>
+              <a:rPr/>
               <a:t>? Or would I need 100 years / 1 billion dollars / a vast research team to do it?</a:t>
             </a:r>
           </a:p>
           <a:p>
             <a:pPr lvl="0"/>
             <a:r>
+              <a:rPr/>
               <a:t>Will I be able to answer this question with </a:t>
             </a:r>
             <a:r>
@@ -3968,6 +4022,7 @@
               <a:t>methods</a:t>
             </a:r>
             <a:r>
+              <a:rPr/>
               <a:t> that I know and </a:t>
             </a:r>
             <a:r>
@@ -3975,6 +4030,7 @@
               <a:t>data</a:t>
             </a:r>
             <a:r>
+              <a:rPr/>
               <a:t> that I can access?</a:t>
             </a:r>
           </a:p>
@@ -4034,18 +4090,21 @@
           <a:p>
             <a:pPr lvl="0"/>
             <a:r>
+              <a:rPr/>
               <a:t>Has this question been answered before?</a:t>
             </a:r>
           </a:p>
           <a:p>
             <a:pPr lvl="1"/>
             <a:r>
+              <a:rPr/>
               <a:t>Not always obvious… Many different literatures, disciplines, traditions work on related problems.</a:t>
             </a:r>
           </a:p>
           <a:p>
             <a:pPr lvl="0"/>
             <a:r>
+              <a:rPr/>
               <a:t>Is it </a:t>
             </a:r>
             <a:r>
@@ -4053,12 +4112,14 @@
               <a:t>novel</a:t>
             </a:r>
             <a:r>
+              <a:rPr/>
               <a:t> for good reasons? No one needs an answer to it, or it is unanswerable through research (does God exist?)</a:t>
             </a:r>
           </a:p>
           <a:p>
             <a:pPr lvl="0"/>
             <a:r>
+              <a:rPr/>
               <a:t>Is it likely to remain novel throughout my research? Think of AI: “No one has studied the impact of Gemini 3 / ChatGPT 6 on student learning” (because these systems aren’t released yet - but once they are, the studies will follow).</a:t>
             </a:r>
           </a:p>
@@ -4118,12 +4179,14 @@
           <a:p>
             <a:pPr lvl="0"/>
             <a:r>
+              <a:rPr/>
               <a:t>What happens when I know the results</a:t>
             </a:r>
           </a:p>
           <a:p>
             <a:pPr lvl="0"/>
             <a:r>
+              <a:rPr/>
               <a:t>Is it </a:t>
             </a:r>
             <a:r>
@@ -4131,6 +4194,7 @@
               <a:t>doable</a:t>
             </a:r>
             <a:r>
+              <a:rPr/>
               <a:t> and </a:t>
             </a:r>
             <a:r>
@@ -4138,12 +4202,14 @@
               <a:t>feasible</a:t>
             </a:r>
             <a:r>
+              <a:rPr/>
               <a:t>? Or would I need 100 years / 1 billion dollars / a vast research team to do it?</a:t>
             </a:r>
           </a:p>
           <a:p>
             <a:pPr lvl="0"/>
             <a:r>
+              <a:rPr/>
               <a:t>Will I be able to answer this question with </a:t>
             </a:r>
             <a:r>
@@ -4151,6 +4217,7 @@
               <a:t>methods</a:t>
             </a:r>
             <a:r>
+              <a:rPr/>
               <a:t> that I know and </a:t>
             </a:r>
             <a:r>
@@ -4158,6 +4225,7 @@
               <a:t>data</a:t>
             </a:r>
             <a:r>
+              <a:rPr/>
               <a:t> that I can access?</a:t>
             </a:r>
           </a:p>
@@ -4207,6 +4275,7 @@
               <a:buNone/>
             </a:pPr>
             <a:r>
+              <a:rPr/>
               <a:t>Lecture 1</a:t>
             </a:r>
           </a:p>
@@ -4266,24 +4335,28 @@
           <a:p>
             <a:pPr lvl="0"/>
             <a:r>
+              <a:rPr/>
               <a:t>We’ll all need a candidate research question / topic</a:t>
             </a:r>
           </a:p>
           <a:p>
             <a:pPr lvl="0"/>
             <a:r>
+              <a:rPr/>
               <a:t>Doesn’t need to be your dissertation!</a:t>
             </a:r>
           </a:p>
           <a:p>
             <a:pPr lvl="0"/>
             <a:r>
+              <a:rPr/>
               <a:t>Breakout groups: work on a pseudo-topic</a:t>
             </a:r>
           </a:p>
           <a:p>
             <a:pPr lvl="0"/>
             <a:r>
+              <a:rPr/>
               <a:t>Document the topic!</a:t>
             </a:r>
           </a:p>
@@ -4345,6 +4418,7 @@
               <a:buNone/>
             </a:pPr>
             <a:r>
+              <a:rPr/>
               <a:t>Weber, M. (1946). Science as a Vocation. In Science and the Quest for Reality (pp. 382-394). London: Palgrave Macmillan UK.</a:t>
             </a:r>
           </a:p>
@@ -4353,6 +4427,7 @@
               <a:buNone/>
             </a:pPr>
             <a:r>
+              <a:rPr/>
               <a:t>libguides.umn.edu. n.d. “Characteristics of a Good Research Question - Literature Searching - Research Guides at University of Minnesota Minneapolis.” Libguides.umn.edu. [https://libguides.umn.edu/c.php?g=1337354&amp;p=9854773].</a:t>
             </a:r>
           </a:p>
@@ -4412,24 +4487,28 @@
           <a:p>
             <a:pPr lvl="0"/>
             <a:r>
+              <a:rPr/>
               <a:t>What is this course about? Do we need another course on academic literature?</a:t>
             </a:r>
           </a:p>
           <a:p>
             <a:pPr lvl="0"/>
             <a:r>
+              <a:rPr/>
               <a:t>Foundational: How to Develop a Literature Review</a:t>
             </a:r>
           </a:p>
           <a:p>
             <a:pPr lvl="0"/>
             <a:r>
+              <a:rPr/>
               <a:t>Future-Oriented: How AI is Impacting Academic Literature / Scholarship</a:t>
             </a:r>
           </a:p>
           <a:p>
             <a:pPr lvl="0"/>
             <a:r>
+              <a:rPr/>
               <a:t>Mix of Theory and Practice</a:t>
             </a:r>
           </a:p>
@@ -4491,6 +4570,7 @@
               <a:buNone/>
             </a:pPr>
             <a:r>
+              <a:rPr/>
               <a:t>How do you build a sense of your field and its gaps? This course aims to make sense of a term – academic literature – at once mundane and mystical. It starts with fundamentals: how to build, annotate, analyze, map and translate a literature database into a literature review. It progresses to think about how AI and other technology can help foster more critical, analytic and reflexive modes of interpretation and understandings of the field.</a:t>
             </a:r>
           </a:p>
@@ -4499,6 +4579,7 @@
               <a:buNone/>
             </a:pPr>
             <a:r>
+              <a:rPr/>
               <a:t>All required material (video lectures, readings etc.) will be provided to students.</a:t>
             </a:r>
           </a:p>
@@ -4558,42 +4639,49 @@
           <a:p>
             <a:pPr lvl="0"/>
             <a:r>
+              <a:rPr/>
               <a:t>Week 1 - Course Overview / What’s a Good Research Question? / AI tools for literature</a:t>
             </a:r>
           </a:p>
           <a:p>
             <a:pPr lvl="0"/>
             <a:r>
+              <a:rPr/>
               <a:t>Week 2 - Where’s the Gap? Mapping a Field / Anatomy of a Journal Article</a:t>
             </a:r>
           </a:p>
           <a:p>
             <a:pPr lvl="0"/>
             <a:r>
+              <a:rPr/>
               <a:t>Week 3 - Does Artificial Intelligence mean Artificial Knowledge? How AI is Impacting Academia / Vibe Scholarship (Is It as Bad as It Sounds?)</a:t>
             </a:r>
           </a:p>
           <a:p>
             <a:pPr lvl="0"/>
             <a:r>
+              <a:rPr/>
               <a:t>Week 4 - Academic Audiences and Techniques of Persuasion / Finding Your Scholarly Voice: Peers / Audience / Venue / Field</a:t>
             </a:r>
           </a:p>
           <a:p>
             <a:pPr lvl="0"/>
             <a:r>
+              <a:rPr/>
               <a:t>Week 5 - “What Do I Know?” Towards A Sociology of Knowledge / Designing a Literature Review</a:t>
             </a:r>
           </a:p>
           <a:p>
             <a:pPr lvl="0"/>
             <a:r>
+              <a:rPr/>
               <a:t>Week 6 - The Reflexive Researcher</a:t>
             </a:r>
           </a:p>
           <a:p>
             <a:pPr lvl="0"/>
             <a:r>
+              <a:rPr/>
               <a:t>Week 7 - The Automatic Academy? The Future of Scholarship</a:t>
             </a:r>
           </a:p>
@@ -4655,6 +4743,7 @@
               <a:buNone/>
             </a:pPr>
             <a:r>
+              <a:rPr/>
               <a:t>The aim of the course is to build a </a:t>
             </a:r>
             <a:r>
@@ -4662,6 +4751,7 @@
               <a:t>cumulative</a:t>
             </a:r>
             <a:r>
+              <a:rPr/>
               <a:t> literature review. It is a course in which to experiment with different approaches to engage with literature. Accordingly assessment will focus less on the “correctness” of the final output and more on week-to-week engagement with course materials and activities.</a:t>
             </a:r>
           </a:p>
@@ -4670,6 +4760,7 @@
               <a:buNone/>
             </a:pPr>
             <a:r>
+              <a:rPr/>
               <a:t>That all said, the purpose of the course is to support a dissertation / journal article / other academic writing – to that extent, if the final output does serve other purposes, well and good!</a:t>
             </a:r>
           </a:p>
@@ -4729,42 +4820,49 @@
           <a:p>
             <a:pPr lvl="0"/>
             <a:r>
+              <a:rPr/>
               <a:t>Week 1: First Draft of Research Topic / Research Question (10%)</a:t>
             </a:r>
           </a:p>
           <a:p>
             <a:pPr lvl="0"/>
             <a:r>
+              <a:rPr/>
               <a:t>Week 2: Design, Method and Structure of the Literature Review (10%)</a:t>
             </a:r>
           </a:p>
           <a:p>
             <a:pPr lvl="0"/>
             <a:r>
+              <a:rPr/>
               <a:t>Week 3: Concept Map of the Literature (10%)</a:t>
             </a:r>
           </a:p>
           <a:p>
             <a:pPr lvl="0"/>
             <a:r>
+              <a:rPr/>
               <a:t>Week 4: Literature Review Sample: In the Scientific Mode / In the Humanities Mode (10%)</a:t>
             </a:r>
           </a:p>
           <a:p>
             <a:pPr lvl="0"/>
             <a:r>
+              <a:rPr/>
               <a:t>Week 5: Literature Review: Signposting (10%)</a:t>
             </a:r>
           </a:p>
           <a:p>
             <a:pPr lvl="0"/>
             <a:r>
+              <a:rPr/>
               <a:t>Week 6: Statement about the use of AI in your Literature Review / Reflection about the role of AI in academia (10%)</a:t>
             </a:r>
           </a:p>
           <a:p>
             <a:pPr lvl="0"/>
             <a:r>
+              <a:rPr/>
               <a:t>Week 7: Final Literature Review (40%) - </a:t>
             </a:r>
             <a:r>
@@ -4946,6 +5044,7 @@
                         <a:buNone/>
                       </a:pPr>
                       <a:r>
+                        <a:rPr/>
                         <a:t>Course Overview / Anatomy of a Journal Article / What Makes a Good Research Question?</a:t>
                       </a:r>
                     </a:p>
@@ -4961,6 +5060,7 @@
                         <a:buNone/>
                       </a:pPr>
                       <a:r>
+                        <a:rPr/>
                         <a:t>AI Tools for Literature</a:t>
                       </a:r>
                     </a:p>
@@ -4976,6 +5076,7 @@
                         <a:buNone/>
                       </a:pPr>
                       <a:r>
+                        <a:rPr/>
                         <a:t>First Draft of Research Topic / Research Question</a:t>
                       </a:r>
                     </a:p>
@@ -5014,6 +5115,7 @@
                         <a:buNone/>
                       </a:pPr>
                       <a:r>
+                        <a:rPr/>
                         <a:t>Academic Audiences and Techniques of Persuasion</a:t>
                       </a:r>
                     </a:p>
@@ -5029,6 +5131,7 @@
                         <a:buNone/>
                       </a:pPr>
                       <a:r>
+                        <a:rPr/>
                         <a:t>Where’s the Gap? Mapping a Field</a:t>
                       </a:r>
                     </a:p>
@@ -5044,6 +5147,7 @@
                         <a:buNone/>
                       </a:pPr>
                       <a:r>
+                        <a:rPr/>
                         <a:t>Design, Method and Structure of the Literature Review</a:t>
                       </a:r>
                     </a:p>
@@ -5082,6 +5186,7 @@
                         <a:buNone/>
                       </a:pPr>
                       <a:r>
+                        <a:rPr/>
                         <a:t>Does Artificial Intelligence Mean Artificial Knowledge? How AI is Impacting Academia</a:t>
                       </a:r>
                     </a:p>
@@ -5097,6 +5202,7 @@
                         <a:buNone/>
                       </a:pPr>
                       <a:r>
+                        <a:rPr/>
                         <a:t>Vibe Scholarship (Is It as Bad as It Sounds?)</a:t>
                       </a:r>
                     </a:p>
@@ -5112,6 +5218,7 @@
                         <a:buNone/>
                       </a:pPr>
                       <a:r>
+                        <a:rPr/>
                         <a:t>Concept Map of the Literature</a:t>
                       </a:r>
                     </a:p>
@@ -5150,6 +5257,7 @@
                         <a:buNone/>
                       </a:pPr>
                       <a:r>
+                        <a:rPr/>
                         <a:t>Finding Your Scholarly Voice: Peers / Audience / Venue / Field</a:t>
                       </a:r>
                     </a:p>
@@ -5165,6 +5273,7 @@
                         <a:buNone/>
                       </a:pPr>
                       <a:r>
+                        <a:rPr/>
                         <a:t>Drafting a section of your review in a </a:t>
                       </a:r>
                       <a:r>
@@ -5172,6 +5281,7 @@
                         <a:t>scientific</a:t>
                       </a:r>
                       <a:r>
+                        <a:rPr/>
                         <a:t> and </a:t>
                       </a:r>
                       <a:r>
@@ -5179,6 +5289,7 @@
                         <a:t>humanities</a:t>
                       </a:r>
                       <a:r>
+                        <a:rPr/>
                         <a:t> mode</a:t>
                       </a:r>
                     </a:p>
@@ -5194,6 +5305,7 @@
                         <a:buNone/>
                       </a:pPr>
                       <a:r>
+                        <a:rPr/>
                         <a:t>Literature Review Sample: In the Scientific Mode</a:t>
                       </a:r>
                     </a:p>
@@ -5232,6 +5344,7 @@
                         <a:buNone/>
                       </a:pPr>
                       <a:r>
+                        <a:rPr/>
                         <a:t>“What Do I Know?” Towards A Sociology of Knowledge</a:t>
                       </a:r>
                     </a:p>
@@ -5247,6 +5360,7 @@
                         <a:buNone/>
                       </a:pPr>
                       <a:r>
+                        <a:rPr/>
                         <a:t>Framing Language: “Carry” Your Reader</a:t>
                       </a:r>
                     </a:p>
@@ -5262,6 +5376,7 @@
                         <a:buNone/>
                       </a:pPr>
                       <a:r>
+                        <a:rPr/>
                         <a:t>Frame up your Literature Review</a:t>
                       </a:r>
                     </a:p>
@@ -5300,6 +5415,7 @@
                         <a:buNone/>
                       </a:pPr>
                       <a:r>
+                        <a:rPr/>
                         <a:t>The Reflexive Researcher and Interpreting Scholarship</a:t>
                       </a:r>
                     </a:p>
@@ -5315,6 +5431,7 @@
                         <a:buNone/>
                       </a:pPr>
                       <a:r>
+                        <a:rPr/>
                         <a:t>Reflecting on your positionality vis-a-vis interpretation; drafting a statement about AI’s epistemic role</a:t>
                       </a:r>
                     </a:p>
@@ -5330,6 +5447,7 @@
                         <a:buNone/>
                       </a:pPr>
                       <a:r>
+                        <a:rPr/>
                         <a:t>Statement on the Use of AI in Your Literature Review / Reflection on the Role of AI in Academia</a:t>
                       </a:r>
                     </a:p>
@@ -5368,6 +5486,7 @@
                         <a:buNone/>
                       </a:pPr>
                       <a:r>
+                        <a:rPr/>
                         <a:t>The Automatic Academy? The Future of Scholarship</a:t>
                       </a:r>
                     </a:p>
@@ -5383,6 +5502,7 @@
                         <a:buNone/>
                       </a:pPr>
                       <a:r>
+                        <a:rPr/>
                         <a:t>Compiling a complete literature review</a:t>
                       </a:r>
                     </a:p>
@@ -5473,6 +5593,7 @@
               <a:t>Develop</a:t>
             </a:r>
             <a:r>
+              <a:rPr/>
               <a:t> novel, significant and feasible research question</a:t>
             </a:r>
           </a:p>
@@ -5483,6 +5604,7 @@
               <a:t>Compile</a:t>
             </a:r>
             <a:r>
+              <a:rPr/>
               <a:t> relevant map of the field relating to the research question</a:t>
             </a:r>
           </a:p>
@@ -5493,6 +5615,7 @@
               <a:t>Choose</a:t>
             </a:r>
             <a:r>
+              <a:rPr/>
               <a:t> and </a:t>
             </a:r>
             <a:r>
@@ -5500,6 +5623,7 @@
               <a:t>apply</a:t>
             </a:r>
             <a:r>
+              <a:rPr/>
               <a:t> appropriate citation practices (science / humanities / mix) for question &amp; field</a:t>
             </a:r>
           </a:p>
@@ -5510,6 +5634,7 @@
               <a:t>Use</a:t>
             </a:r>
             <a:r>
+              <a:rPr/>
               <a:t> framing / signposting / metadiscursive language</a:t>
             </a:r>
           </a:p>
@@ -5520,6 +5645,7 @@
               <a:t>Show</a:t>
             </a:r>
             <a:r>
+              <a:rPr/>
               <a:t> reflexivity as a scholar</a:t>
             </a:r>
           </a:p>
@@ -5530,6 +5656,7 @@
               <a:t>Acknowledge</a:t>
             </a:r>
             <a:r>
+              <a:rPr/>
               <a:t> and </a:t>
             </a:r>
             <a:r>
@@ -5537,12 +5664,14 @@
               <a:t>demonstrate</a:t>
             </a:r>
             <a:r>
+              <a:rPr/>
               <a:t> appropriate use of AI</a:t>
             </a:r>
           </a:p>
           <a:p>
             <a:pPr lvl="0"/>
             <a:r>
+              <a:rPr/>
               <a:t>Use all of the above to </a:t>
             </a:r>
             <a:r>
@@ -5550,6 +5679,7 @@
               <a:t>highlight</a:t>
             </a:r>
             <a:r>
+              <a:rPr/>
               <a:t> a plausible gap in the literature</a:t>
             </a:r>
           </a:p>

--- a/courses/590-fall-2026/590-lecture-1.pptx
+++ b/courses/590-fall-2026/590-lecture-1.pptx
@@ -4419,7 +4419,7 @@
             </a:pPr>
             <a:r>
               <a:rPr/>
-              <a:t>Weber, M. (1946). Science as a Vocation. In Science and the Quest for Reality (pp. 382-394). London: Palgrave Macmillan UK.</a:t>
+              <a:t>Weber, M. (1946). Science as a vocation. In H. H. Gerth &amp; C. W. Mills (Eds. &amp; Trans.), From Max Weber: Essays in sociology (pp. 129–156). Oxford University Press.</a:t>
             </a:r>
           </a:p>
           <a:p>

--- a/courses/590-fall-2026/590-lecture-1.pptx
+++ b/courses/590-fall-2026/590-lecture-1.pptx
@@ -23,7 +23,6 @@
     <p:sldId id="271" r:id="rId17"/>
     <p:sldId id="272" r:id="rId18"/>
     <p:sldId id="273" r:id="rId19"/>
-    <p:sldId id="274" r:id="rId20"/>
     <p:sldId id="275" r:id="rId21"/>
     <p:sldId id="276" r:id="rId22"/>
   </p:sldIdLst>
@@ -4133,112 +4132,6 @@
 </p:sld>
 </file>
 
-<file path=ppt/slides/slide19.xml><?xml version="1.0" encoding="utf-8"?>
-<p:sld xmlns:a="http://schemas.openxmlformats.org/drawingml/2006/main" xmlns:r="http://schemas.openxmlformats.org/officeDocument/2006/relationships" xmlns:p="http://schemas.openxmlformats.org/presentationml/2006/main">
-  <p:cSld>
-    <p:spTree>
-      <p:nvGrpSpPr>
-        <p:cNvPr id="1" name=""/>
-        <p:cNvGrpSpPr/>
-        <p:nvPr/>
-      </p:nvGrpSpPr>
-      <p:grpSpPr>
-        <a:xfrm>
-          <a:off x="0" y="0"/>
-          <a:ext cx="0" cy="0"/>
-          <a:chOff x="0" y="0"/>
-          <a:chExt cx="0" cy="0"/>
-        </a:xfrm>
-      </p:grpSpPr>
-      <p:sp>
-        <p:nvSpPr>
-          <p:cNvPr id="3" name="Content Placeholder 2"/>
-          <p:cNvSpPr>
-            <a:spLocks noGrp="1"/>
-          </p:cNvSpPr>
-          <p:nvPr>
-            <p:ph idx="1"/>
-          </p:nvPr>
-        </p:nvSpPr>
-        <p:spPr/>
-        <p:txBody>
-          <a:bodyPr/>
-          <a:lstStyle/>
-          <a:p>
-            <a:pPr marL="0" lvl="0" indent="0">
-              <a:spcBef>
-                <a:spcPts val="3000"/>
-              </a:spcBef>
-              <a:buNone/>
-            </a:pPr>
-            <a:r>
-              <a:rPr b="1"/>
-              <a:t>What Makes a Good Research Question? Consequences</a:t>
-            </a:r>
-          </a:p>
-          <a:p>
-            <a:pPr lvl="0"/>
-            <a:r>
-              <a:rPr/>
-              <a:t>What happens when I know the results</a:t>
-            </a:r>
-          </a:p>
-          <a:p>
-            <a:pPr lvl="0"/>
-            <a:r>
-              <a:rPr/>
-              <a:t>Is it </a:t>
-            </a:r>
-            <a:r>
-              <a:rPr i="1"/>
-              <a:t>doable</a:t>
-            </a:r>
-            <a:r>
-              <a:rPr/>
-              <a:t> and </a:t>
-            </a:r>
-            <a:r>
-              <a:rPr i="1"/>
-              <a:t>feasible</a:t>
-            </a:r>
-            <a:r>
-              <a:rPr/>
-              <a:t>? Or would I need 100 years / 1 billion dollars / a vast research team to do it?</a:t>
-            </a:r>
-          </a:p>
-          <a:p>
-            <a:pPr lvl="0"/>
-            <a:r>
-              <a:rPr/>
-              <a:t>Will I be able to answer this question with </a:t>
-            </a:r>
-            <a:r>
-              <a:rPr i="1"/>
-              <a:t>methods</a:t>
-            </a:r>
-            <a:r>
-              <a:rPr/>
-              <a:t> that I know and </a:t>
-            </a:r>
-            <a:r>
-              <a:rPr i="1"/>
-              <a:t>data</a:t>
-            </a:r>
-            <a:r>
-              <a:rPr/>
-              <a:t> that I can access?</a:t>
-            </a:r>
-          </a:p>
-        </p:txBody>
-      </p:sp>
-    </p:spTree>
-  </p:cSld>
-  <p:clrMapOvr>
-    <a:masterClrMapping/>
-  </p:clrMapOvr>
-</p:sld>
-</file>
-
 <file path=ppt/slides/slide2.xml><?xml version="1.0" encoding="utf-8"?>
 <p:sld xmlns:a="http://schemas.openxmlformats.org/drawingml/2006/main" xmlns:r="http://schemas.openxmlformats.org/officeDocument/2006/relationships" xmlns:p="http://schemas.openxmlformats.org/presentationml/2006/main">
   <p:cSld>
@@ -4640,49 +4533,49 @@
             <a:pPr lvl="0"/>
             <a:r>
               <a:rPr/>
-              <a:t>Week 1 - Course Overview / What’s a Good Research Question? / AI tools for literature</a:t>
-            </a:r>
-          </a:p>
-          <a:p>
-            <a:pPr lvl="0"/>
-            <a:r>
-              <a:rPr/>
-              <a:t>Week 2 - Where’s the Gap? Mapping a Field / Anatomy of a Journal Article</a:t>
-            </a:r>
-          </a:p>
-          <a:p>
-            <a:pPr lvl="0"/>
-            <a:r>
-              <a:rPr/>
-              <a:t>Week 3 - Does Artificial Intelligence mean Artificial Knowledge? How AI is Impacting Academia / Vibe Scholarship (Is It as Bad as It Sounds?)</a:t>
-            </a:r>
-          </a:p>
-          <a:p>
-            <a:pPr lvl="0"/>
-            <a:r>
-              <a:rPr/>
-              <a:t>Week 4 - Academic Audiences and Techniques of Persuasion / Finding Your Scholarly Voice: Peers / Audience / Venue / Field</a:t>
-            </a:r>
-          </a:p>
-          <a:p>
-            <a:pPr lvl="0"/>
-            <a:r>
-              <a:rPr/>
-              <a:t>Week 5 - “What Do I Know?” Towards A Sociology of Knowledge / Designing a Literature Review</a:t>
-            </a:r>
-          </a:p>
-          <a:p>
-            <a:pPr lvl="0"/>
-            <a:r>
-              <a:rPr/>
-              <a:t>Week 6 - The Reflexive Researcher</a:t>
-            </a:r>
-          </a:p>
-          <a:p>
-            <a:pPr lvl="0"/>
-            <a:r>
-              <a:rPr/>
-              <a:t>Week 7 - The Automatic Academy? The Future of Scholarship</a:t>
+              <a:t>Session 1 (Oct 19) – Research questions and academic literature</a:t>
+            </a:r>
+          </a:p>
+          <a:p>
+            <a:pPr lvl="0"/>
+            <a:r>
+              <a:rPr/>
+              <a:t>Session 2 (Oct 26) – Article anatomy, review design and mapping a field</a:t>
+            </a:r>
+          </a:p>
+          <a:p>
+            <a:pPr lvl="0"/>
+            <a:r>
+              <a:rPr/>
+              <a:t>Session 3 (Nov 2) – AI-assisted close and distant reading</a:t>
+            </a:r>
+          </a:p>
+          <a:p>
+            <a:pPr lvl="0"/>
+            <a:r>
+              <a:rPr/>
+              <a:t>Session 4 (Nov 9) – Difficult texts, audiences and scholarly voice</a:t>
+            </a:r>
+          </a:p>
+          <a:p>
+            <a:pPr lvl="0"/>
+            <a:r>
+              <a:rPr/>
+              <a:t>Session 5 (Nov 16) – Structure, signposting and scholarly communities</a:t>
+            </a:r>
+          </a:p>
+          <a:p>
+            <a:pPr lvl="0"/>
+            <a:r>
+              <a:rPr/>
+              <a:t>Session 6 (Nov 30) – Reflexivity, positionality and AI in scholarship (no seminar Nov 23)</a:t>
+            </a:r>
+          </a:p>
+          <a:p>
+            <a:pPr lvl="0"/>
+            <a:r>
+              <a:rPr/>
+              <a:t>Session 7 (Dec 7) – The future of scholarship and final review workshop</a:t>
             </a:r>
           </a:p>
         </p:txBody>
@@ -4821,53 +4714,53 @@
             <a:pPr lvl="0"/>
             <a:r>
               <a:rPr/>
-              <a:t>Week 1: First Draft of Research Topic / Research Question (10%)</a:t>
-            </a:r>
-          </a:p>
-          <a:p>
-            <a:pPr lvl="0"/>
-            <a:r>
-              <a:rPr/>
-              <a:t>Week 2: Design, Method and Structure of the Literature Review (10%)</a:t>
-            </a:r>
-          </a:p>
-          <a:p>
-            <a:pPr lvl="0"/>
-            <a:r>
-              <a:rPr/>
-              <a:t>Week 3: Concept Map of the Literature (10%)</a:t>
-            </a:r>
-          </a:p>
-          <a:p>
-            <a:pPr lvl="0"/>
-            <a:r>
-              <a:rPr/>
-              <a:t>Week 4: Literature Review Sample: In the Scientific Mode / In the Humanities Mode (10%)</a:t>
-            </a:r>
-          </a:p>
-          <a:p>
-            <a:pPr lvl="0"/>
-            <a:r>
-              <a:rPr/>
-              <a:t>Week 5: Literature Review: Signposting (10%)</a:t>
-            </a:r>
-          </a:p>
-          <a:p>
-            <a:pPr lvl="0"/>
-            <a:r>
-              <a:rPr/>
-              <a:t>Week 6: Statement about the use of AI in your Literature Review / Reflection about the role of AI in academia (10%)</a:t>
-            </a:r>
-          </a:p>
-          <a:p>
-            <a:pPr lvl="0"/>
-            <a:r>
-              <a:rPr/>
-              <a:t>Week 7: Final Literature Review (40%) - </a:t>
+              <a:t>1 Research topic and question (10%) – Fri Oct 23</a:t>
+            </a:r>
+          </a:p>
+          <a:p>
+            <a:pPr lvl="0"/>
+            <a:r>
+              <a:rPr/>
+              <a:t>2 Review design method and scope (10%) – Fri Oct 30</a:t>
+            </a:r>
+          </a:p>
+          <a:p>
+            <a:pPr lvl="0"/>
+            <a:r>
+              <a:rPr/>
+              <a:t>3 Conceptual map of the literature (10%) – Fri Nov 6</a:t>
+            </a:r>
+          </a:p>
+          <a:p>
+            <a:pPr lvl="0"/>
+            <a:r>
+              <a:rPr/>
+              <a:t>4 Literature review writing sample (10%) – Fri Nov 13</a:t>
+            </a:r>
+          </a:p>
+          <a:p>
+            <a:pPr lvl="0"/>
+            <a:r>
+              <a:rPr/>
+              <a:t>5 Structured draft and signposting (10%) – Fri Nov 20</a:t>
+            </a:r>
+          </a:p>
+          <a:p>
+            <a:pPr lvl="0"/>
+            <a:r>
+              <a:rPr/>
+              <a:t>6 AI-use statement and reflexive commentary (10%) – Fri Dec 4</a:t>
+            </a:r>
+          </a:p>
+          <a:p>
+            <a:pPr lvl="0"/>
+            <a:r>
+              <a:rPr/>
+              <a:t>7 Final literature review (40%) – Due Tuesday Dec 15, 2026, 11:59 PM Central; 1,500–2,000 words</a:t>
             </a:r>
             <a:r>
               <a:rPr b="1"/>
-              <a:t>Due Tuesday Dec 15, 2026, 11:59 PM Central</a:t>
+              <a:t/>
             </a:r>
           </a:p>
         </p:txBody>
@@ -4958,7 +4851,7 @@
                       </a:pPr>
                       <a:r>
                         <a:rPr b="1"/>
-                        <a:t>Week</a:t>
+                        <a:t>Session</a:t>
                       </a:r>
                     </a:p>
                   </a:txBody>
@@ -4974,7 +4867,7 @@
                       </a:pPr>
                       <a:r>
                         <a:rPr b="1"/>
-                        <a:t>Theory</a:t>
+                        <a:t>Seminar</a:t>
                       </a:r>
                     </a:p>
                   </a:txBody>
@@ -4990,7 +4883,7 @@
                       </a:pPr>
                       <a:r>
                         <a:rPr b="1"/>
-                        <a:t>Practice</a:t>
+                        <a:t>Focus</a:t>
                       </a:r>
                     </a:p>
                   </a:txBody>
@@ -5006,7 +4899,7 @@
                       </a:pPr>
                       <a:r>
                         <a:rPr b="1"/>
-                        <a:t>Assessment</a:t>
+                        <a:t>Task due</a:t>
                       </a:r>
                     </a:p>
                   </a:txBody>
@@ -5045,7 +4938,7 @@
                       </a:pPr>
                       <a:r>
                         <a:rPr/>
-                        <a:t>Course Overview / Anatomy of a Journal Article / What Makes a Good Research Question?</a:t>
+                        <a:t>Oct 19</a:t>
                       </a:r>
                     </a:p>
                   </a:txBody>
@@ -5061,7 +4954,7 @@
                       </a:pPr>
                       <a:r>
                         <a:rPr/>
-                        <a:t>AI Tools for Literature</a:t>
+                        <a:t>Research questions and academic literature</a:t>
                       </a:r>
                     </a:p>
                   </a:txBody>
@@ -5077,7 +4970,7 @@
                       </a:pPr>
                       <a:r>
                         <a:rPr/>
-                        <a:t>First Draft of Research Topic / Research Question</a:t>
+                        <a:t>1 Research topic and question</a:t>
                       </a:r>
                     </a:p>
                   </a:txBody>
@@ -5116,7 +5009,7 @@
                       </a:pPr>
                       <a:r>
                         <a:rPr/>
-                        <a:t>Academic Audiences and Techniques of Persuasion</a:t>
+                        <a:t>Oct 26</a:t>
                       </a:r>
                     </a:p>
                   </a:txBody>
@@ -5132,7 +5025,7 @@
                       </a:pPr>
                       <a:r>
                         <a:rPr/>
-                        <a:t>Where’s the Gap? Mapping a Field</a:t>
+                        <a:t>Article anatomy, review design and mapping a field</a:t>
                       </a:r>
                     </a:p>
                   </a:txBody>
@@ -5148,7 +5041,7 @@
                       </a:pPr>
                       <a:r>
                         <a:rPr/>
-                        <a:t>Design, Method and Structure of the Literature Review</a:t>
+                        <a:t>2 Review design method and scope</a:t>
                       </a:r>
                     </a:p>
                   </a:txBody>
@@ -5187,7 +5080,7 @@
                       </a:pPr>
                       <a:r>
                         <a:rPr/>
-                        <a:t>Does Artificial Intelligence Mean Artificial Knowledge? How AI is Impacting Academia</a:t>
+                        <a:t>Nov 2</a:t>
                       </a:r>
                     </a:p>
                   </a:txBody>
@@ -5203,7 +5096,7 @@
                       </a:pPr>
                       <a:r>
                         <a:rPr/>
-                        <a:t>Vibe Scholarship (Is It as Bad as It Sounds?)</a:t>
+                        <a:t>AI-assisted close and distant reading</a:t>
                       </a:r>
                     </a:p>
                   </a:txBody>
@@ -5219,7 +5112,7 @@
                       </a:pPr>
                       <a:r>
                         <a:rPr/>
-                        <a:t>Concept Map of the Literature</a:t>
+                        <a:t>3 Conceptual map of the literature</a:t>
                       </a:r>
                     </a:p>
                   </a:txBody>
@@ -5258,7 +5151,7 @@
                       </a:pPr>
                       <a:r>
                         <a:rPr/>
-                        <a:t>Finding Your Scholarly Voice: Peers / Audience / Venue / Field</a:t>
+                        <a:t>Nov 9</a:t>
                       </a:r>
                     </a:p>
                   </a:txBody>
@@ -5274,23 +5167,23 @@
                       </a:pPr>
                       <a:r>
                         <a:rPr/>
-                        <a:t>Drafting a section of your review in a </a:t>
+                        <a:t>Difficult texts, audiences and scholarly voice</a:t>
                       </a:r>
                       <a:r>
                         <a:rPr i="1"/>
-                        <a:t>scientific</a:t>
+                        <a:t/>
                       </a:r>
                       <a:r>
                         <a:rPr/>
-                        <a:t> and </a:t>
+                        <a:t/>
                       </a:r>
                       <a:r>
                         <a:rPr i="1"/>
-                        <a:t>humanities</a:t>
+                        <a:t/>
                       </a:r>
                       <a:r>
                         <a:rPr/>
-                        <a:t> mode</a:t>
+                        <a:t/>
                       </a:r>
                     </a:p>
                   </a:txBody>
@@ -5306,7 +5199,7 @@
                       </a:pPr>
                       <a:r>
                         <a:rPr/>
-                        <a:t>Literature Review Sample: In the Scientific Mode</a:t>
+                        <a:t>4 Literature review writing sample</a:t>
                       </a:r>
                     </a:p>
                   </a:txBody>
@@ -5345,7 +5238,7 @@
                       </a:pPr>
                       <a:r>
                         <a:rPr/>
-                        <a:t>“What Do I Know?” Towards A Sociology of Knowledge</a:t>
+                        <a:t>Nov 16</a:t>
                       </a:r>
                     </a:p>
                   </a:txBody>
@@ -5361,7 +5254,7 @@
                       </a:pPr>
                       <a:r>
                         <a:rPr/>
-                        <a:t>Framing Language: “Carry” Your Reader</a:t>
+                        <a:t>Structure, signposting and scholarly communities</a:t>
                       </a:r>
                     </a:p>
                   </a:txBody>
@@ -5377,7 +5270,7 @@
                       </a:pPr>
                       <a:r>
                         <a:rPr/>
-                        <a:t>Frame up your Literature Review</a:t>
+                        <a:t>5 Structured draft and signposting</a:t>
                       </a:r>
                     </a:p>
                   </a:txBody>
@@ -5416,7 +5309,7 @@
                       </a:pPr>
                       <a:r>
                         <a:rPr/>
-                        <a:t>The Reflexive Researcher and Interpreting Scholarship</a:t>
+                        <a:t>Nov 30</a:t>
                       </a:r>
                     </a:p>
                   </a:txBody>
@@ -5432,7 +5325,7 @@
                       </a:pPr>
                       <a:r>
                         <a:rPr/>
-                        <a:t>Reflecting on your positionality vis-a-vis interpretation; drafting a statement about AI’s epistemic role</a:t>
+                        <a:t>Reflexivity, positionality and AI in scholarship</a:t>
                       </a:r>
                     </a:p>
                   </a:txBody>
@@ -5448,7 +5341,7 @@
                       </a:pPr>
                       <a:r>
                         <a:rPr/>
-                        <a:t>Statement on the Use of AI in Your Literature Review / Reflection on the Role of AI in Academia</a:t>
+                        <a:t>6 AI-use statement and reflexive commentary</a:t>
                       </a:r>
                     </a:p>
                   </a:txBody>
@@ -5487,7 +5380,7 @@
                       </a:pPr>
                       <a:r>
                         <a:rPr/>
-                        <a:t>The Automatic Academy? The Future of Scholarship</a:t>
+                        <a:t>Dec 7</a:t>
                       </a:r>
                     </a:p>
                   </a:txBody>
@@ -5503,7 +5396,7 @@
                       </a:pPr>
                       <a:r>
                         <a:rPr/>
-                        <a:t>Compiling a complete literature review</a:t>
+                        <a:t>Future of scholarship; final review workshop</a:t>
                       </a:r>
                     </a:p>
                   </a:txBody>
@@ -5519,7 +5412,7 @@
                       </a:pPr>
                       <a:r>
                         <a:rPr dirty="0"/>
-                        <a:t>Final Literature Review</a:t>
+                        <a:t>7 Final literature review (Tue Dec 15)</a:t>
                       </a:r>
                     </a:p>
                   </a:txBody>
@@ -5583,104 +5476,89 @@
             </a:pPr>
             <a:r>
               <a:rPr b="1"/>
-              <a:t>Rubric / Criteria</a:t>
-            </a:r>
-          </a:p>
-          <a:p>
-            <a:pPr lvl="0"/>
+              <a:t>Assessment criteria</a:t>
+            </a:r>
+          </a:p>
+          <a:p>
+            <a:pPr lvl="0"/>
+            <a:r>
+              <a:rPr b="0"/>
+              <a:t>Significance and feasibility of the question</a:t>
+            </a:r>
+            <a:r>
+              <a:rPr/>
+              <a:t/>
+            </a:r>
+          </a:p>
+          <a:p>
+            <a:pPr lvl="0"/>
+            <a:r>
+              <a:rPr b="0"/>
+              <a:t>Relevance and traceability of sources</a:t>
+            </a:r>
+            <a:r>
+              <a:rPr/>
+              <a:t/>
+            </a:r>
+          </a:p>
+          <a:p>
+            <a:pPr lvl="0"/>
+            <a:r>
+              <a:rPr b="0"/>
+              <a:t>Quality of interpretation and synthesis</a:t>
+            </a:r>
+            <a:r>
+              <a:rPr/>
+              <a:t/>
+            </a:r>
             <a:r>
               <a:rPr b="1"/>
-              <a:t>Develop</a:t>
-            </a:r>
-            <a:r>
-              <a:rPr/>
-              <a:t> novel, significant and feasible research question</a:t>
-            </a:r>
-          </a:p>
-          <a:p>
-            <a:pPr lvl="0"/>
+              <a:t/>
+            </a:r>
+            <a:r>
+              <a:rPr/>
+              <a:t/>
+            </a:r>
+          </a:p>
+          <a:p>
+            <a:pPr lvl="0"/>
+            <a:r>
+              <a:rPr b="0"/>
+              <a:t>Clarity of organization, framing and scholarly voice</a:t>
+            </a:r>
+            <a:r>
+              <a:rPr/>
+              <a:t/>
+            </a:r>
+          </a:p>
+          <a:p>
+            <a:pPr lvl="0"/>
+            <a:r>
+              <a:rPr b="0"/>
+              <a:t>Reflexivity and responsible, transparent AI use</a:t>
+            </a:r>
+            <a:r>
+              <a:rPr/>
+              <a:t/>
+            </a:r>
+          </a:p>
+          <a:p>
+            <a:pPr lvl="0"/>
+            <a:r>
+              <a:rPr b="0"/>
+              <a:t>Responsiveness to evidence and feedback</a:t>
+            </a:r>
+            <a:r>
+              <a:rPr/>
+              <a:t/>
+            </a:r>
             <a:r>
               <a:rPr b="1"/>
-              <a:t>Compile</a:t>
-            </a:r>
-            <a:r>
-              <a:rPr/>
-              <a:t> relevant map of the field relating to the research question</a:t>
-            </a:r>
-          </a:p>
-          <a:p>
-            <a:pPr lvl="0"/>
-            <a:r>
-              <a:rPr b="1"/>
-              <a:t>Choose</a:t>
-            </a:r>
-            <a:r>
-              <a:rPr/>
-              <a:t> and </a:t>
-            </a:r>
-            <a:r>
-              <a:rPr b="1"/>
-              <a:t>apply</a:t>
-            </a:r>
-            <a:r>
-              <a:rPr/>
-              <a:t> appropriate citation practices (science / humanities / mix) for question &amp; field</a:t>
-            </a:r>
-          </a:p>
-          <a:p>
-            <a:pPr lvl="0"/>
-            <a:r>
-              <a:rPr b="1"/>
-              <a:t>Use</a:t>
-            </a:r>
-            <a:r>
-              <a:rPr/>
-              <a:t> framing / signposting / metadiscursive language</a:t>
-            </a:r>
-          </a:p>
-          <a:p>
-            <a:pPr lvl="0"/>
-            <a:r>
-              <a:rPr b="1"/>
-              <a:t>Show</a:t>
-            </a:r>
-            <a:r>
-              <a:rPr/>
-              <a:t> reflexivity as a scholar</a:t>
-            </a:r>
-          </a:p>
-          <a:p>
-            <a:pPr lvl="0"/>
-            <a:r>
-              <a:rPr b="1"/>
-              <a:t>Acknowledge</a:t>
-            </a:r>
-            <a:r>
-              <a:rPr/>
-              <a:t> and </a:t>
-            </a:r>
-            <a:r>
-              <a:rPr b="1"/>
-              <a:t>demonstrate</a:t>
-            </a:r>
-            <a:r>
-              <a:rPr/>
-              <a:t> appropriate use of AI</a:t>
-            </a:r>
-          </a:p>
-          <a:p>
-            <a:pPr lvl="0"/>
-            <a:r>
-              <a:rPr/>
-              <a:t>Use all of the above to </a:t>
-            </a:r>
-            <a:r>
-              <a:rPr b="1"/>
-              <a:t>highlight</a:t>
-            </a:r>
-            <a:r>
-              <a:rPr/>
-              <a:t> a plausible gap in the literature</a:t>
+              <a:t/>
+            </a:r>
+            <a:r>
+              <a:rPr/>
+              <a:t/>
             </a:r>
           </a:p>
         </p:txBody>
